--- a/Elearning_Mobile_Developing.pptx
+++ b/Elearning_Mobile_Developing.pptx
@@ -223,7 +223,7 @@
           <a:p>
             <a:fld id="{03B6ED8F-478C-4CD6-BD0D-07047631FB34}" type="datetimeFigureOut">
               <a:rPr lang="vi-VN" smtClean="0"/>
-              <a:t>07/11/2025</a:t>
+              <a:t>25/11/2025</a:t>
             </a:fld>
             <a:endParaRPr lang="vi-VN"/>
           </a:p>
@@ -1056,7 +1056,7 @@
           <a:p>
             <a:fld id="{A3340687-F0A6-4844-9D0E-4A71047B582E}" type="datetime1">
               <a:rPr lang="en-GB" smtClean="0"/>
-              <a:t>07/11/2025</a:t>
+              <a:t>25/11/2025</a:t>
             </a:fld>
             <a:endParaRPr lang="en-GB"/>
           </a:p>
@@ -1229,7 +1229,7 @@
           <a:p>
             <a:fld id="{485F13F3-5CA4-464A-A58E-B619976AB19A}" type="datetime1">
               <a:rPr lang="en-GB" smtClean="0"/>
-              <a:t>07/11/2025</a:t>
+              <a:t>25/11/2025</a:t>
             </a:fld>
             <a:endParaRPr lang="en-GB"/>
           </a:p>
@@ -1412,7 +1412,7 @@
           <a:p>
             <a:fld id="{4580203B-5407-419A-8A7D-10870893C35F}" type="datetime1">
               <a:rPr lang="en-GB" smtClean="0"/>
-              <a:t>07/11/2025</a:t>
+              <a:t>25/11/2025</a:t>
             </a:fld>
             <a:endParaRPr lang="en-GB"/>
           </a:p>
@@ -1628,7 +1628,7 @@
             <a:fld id="{19E0BBC2-331D-455A-8F34-6CACAAA7B272}" type="datetime1">
               <a:rPr lang="en-GB" smtClean="0"/>
               <a:pPr/>
-              <a:t>07/11/2025</a:t>
+              <a:t>25/11/2025</a:t>
             </a:fld>
             <a:endParaRPr lang="en-GB"/>
           </a:p>
@@ -1886,7 +1886,7 @@
           <a:p>
             <a:fld id="{52796F3C-EA11-4B8E-A5D6-898715DAA61A}" type="datetime1">
               <a:rPr lang="en-GB" smtClean="0"/>
-              <a:t>07/11/2025</a:t>
+              <a:t>25/11/2025</a:t>
             </a:fld>
             <a:endParaRPr lang="en-GB"/>
           </a:p>
@@ -2129,7 +2129,7 @@
           <a:p>
             <a:fld id="{9DE42CF6-A011-4145-8138-B18222BE784F}" type="datetime1">
               <a:rPr lang="en-GB" smtClean="0"/>
-              <a:t>07/11/2025</a:t>
+              <a:t>25/11/2025</a:t>
             </a:fld>
             <a:endParaRPr lang="en-GB"/>
           </a:p>
@@ -2499,7 +2499,7 @@
           <a:p>
             <a:fld id="{16776141-2144-4216-A5D8-625EEC9D46A7}" type="datetime1">
               <a:rPr lang="en-GB" smtClean="0"/>
-              <a:t>07/11/2025</a:t>
+              <a:t>25/11/2025</a:t>
             </a:fld>
             <a:endParaRPr lang="en-GB"/>
           </a:p>
@@ -2620,7 +2620,7 @@
           <a:p>
             <a:fld id="{D5231884-8841-474E-B980-3663B77BB24B}" type="datetime1">
               <a:rPr lang="en-GB" smtClean="0"/>
-              <a:t>07/11/2025</a:t>
+              <a:t>25/11/2025</a:t>
             </a:fld>
             <a:endParaRPr lang="en-GB"/>
           </a:p>
@@ -2718,7 +2718,7 @@
           <a:p>
             <a:fld id="{981E740A-6F50-4770-9109-746EC93EBE8F}" type="datetime1">
               <a:rPr lang="en-GB" smtClean="0"/>
-              <a:t>07/11/2025</a:t>
+              <a:t>25/11/2025</a:t>
             </a:fld>
             <a:endParaRPr lang="en-GB"/>
           </a:p>
@@ -2998,7 +2998,7 @@
           <a:p>
             <a:fld id="{8C933542-D7FF-4C5D-BCD1-FC068661ADB1}" type="datetime1">
               <a:rPr lang="en-GB" smtClean="0"/>
-              <a:t>07/11/2025</a:t>
+              <a:t>25/11/2025</a:t>
             </a:fld>
             <a:endParaRPr lang="en-GB"/>
           </a:p>
@@ -3258,7 +3258,7 @@
           <a:p>
             <a:fld id="{F4A70A37-54E1-46AB-854A-7F4CAEAC5932}" type="datetime1">
               <a:rPr lang="en-GB" smtClean="0"/>
-              <a:t>07/11/2025</a:t>
+              <a:t>25/11/2025</a:t>
             </a:fld>
             <a:endParaRPr lang="en-GB"/>
           </a:p>
@@ -3482,7 +3482,7 @@
             <a:fld id="{4C18046E-BA9B-4548-A8AC-F9F2F702B23B}" type="datetime1">
               <a:rPr lang="en-GB" smtClean="0"/>
               <a:pPr/>
-              <a:t>07/11/2025</a:t>
+              <a:t>25/11/2025</a:t>
             </a:fld>
             <a:endParaRPr lang="en-GB"/>
           </a:p>
@@ -4579,7 +4579,7 @@
           <a:p>
             <a:fld id="{485F13F3-5CA4-464A-A58E-B619976AB19A}" type="datetime1">
               <a:rPr lang="en-GB" smtClean="0"/>
-              <a:t>07/11/2025</a:t>
+              <a:t>25/11/2025</a:t>
             </a:fld>
             <a:endParaRPr lang="en-GB"/>
           </a:p>
@@ -5859,7 +5859,7 @@
           <a:p>
             <a:fld id="{485F13F3-5CA4-464A-A58E-B619976AB19A}" type="datetime1">
               <a:rPr lang="en-GB" smtClean="0"/>
-              <a:t>07/11/2025</a:t>
+              <a:t>25/11/2025</a:t>
             </a:fld>
             <a:endParaRPr lang="en-GB"/>
           </a:p>
@@ -7231,7 +7231,7 @@
           <a:p>
             <a:fld id="{485F13F3-5CA4-464A-A58E-B619976AB19A}" type="datetime1">
               <a:rPr lang="en-GB" smtClean="0"/>
-              <a:t>07/11/2025</a:t>
+              <a:t>25/11/2025</a:t>
             </a:fld>
             <a:endParaRPr lang="en-GB"/>
           </a:p>
@@ -8583,7 +8583,7 @@
           <a:p>
             <a:fld id="{485F13F3-5CA4-464A-A58E-B619976AB19A}" type="datetime1">
               <a:rPr lang="en-GB" smtClean="0"/>
-              <a:t>07/11/2025</a:t>
+              <a:t>25/11/2025</a:t>
             </a:fld>
             <a:endParaRPr lang="en-GB"/>
           </a:p>
@@ -9801,7 +9801,7 @@
                   <a:spcPts val="600"/>
                 </a:spcAft>
               </a:pPr>
-              <a:t>07/11/2025</a:t>
+              <a:t>25/11/2025</a:t>
             </a:fld>
             <a:endParaRPr lang="en-GB"/>
           </a:p>
@@ -10510,7 +10510,7 @@
                   <a:spcPts val="600"/>
                 </a:spcAft>
               </a:pPr>
-              <a:t>07/11/2025</a:t>
+              <a:t>25/11/2025</a:t>
             </a:fld>
             <a:endParaRPr lang="en-GB" dirty="0"/>
           </a:p>
@@ -11184,7 +11184,7 @@
           <a:p>
             <a:fld id="{9DE42CF6-A011-4145-8138-B18222BE784F}" type="datetime1">
               <a:rPr lang="en-GB" smtClean="0"/>
-              <a:t>07/11/2025</a:t>
+              <a:t>25/11/2025</a:t>
             </a:fld>
             <a:endParaRPr lang="en-GB"/>
           </a:p>
@@ -11848,7 +11848,7 @@
           <a:p>
             <a:fld id="{9DE42CF6-A011-4145-8138-B18222BE784F}" type="datetime1">
               <a:rPr lang="en-GB" smtClean="0"/>
-              <a:t>07/11/2025</a:t>
+              <a:t>25/11/2025</a:t>
             </a:fld>
             <a:endParaRPr lang="en-GB"/>
           </a:p>
@@ -12745,7 +12745,7 @@
           <a:p>
             <a:fld id="{9DE42CF6-A011-4145-8138-B18222BE784F}" type="datetime1">
               <a:rPr lang="en-GB" smtClean="0"/>
-              <a:t>07/11/2025</a:t>
+              <a:t>25/11/2025</a:t>
             </a:fld>
             <a:endParaRPr lang="en-GB"/>
           </a:p>
@@ -14033,7 +14033,7 @@
           <a:p>
             <a:fld id="{485F13F3-5CA4-464A-A58E-B619976AB19A}" type="datetime1">
               <a:rPr lang="en-GB" smtClean="0"/>
-              <a:t>07/11/2025</a:t>
+              <a:t>25/11/2025</a:t>
             </a:fld>
             <a:endParaRPr lang="en-GB"/>
           </a:p>
@@ -14252,7 +14252,7 @@
           <a:p>
             <a:fld id="{485F13F3-5CA4-464A-A58E-B619976AB19A}" type="datetime1">
               <a:rPr lang="en-GB" smtClean="0"/>
-              <a:t>07/11/2025</a:t>
+              <a:t>25/11/2025</a:t>
             </a:fld>
             <a:endParaRPr lang="en-GB"/>
           </a:p>
@@ -14446,7 +14446,7 @@
           <a:p>
             <a:fld id="{9DE42CF6-A011-4145-8138-B18222BE784F}" type="datetime1">
               <a:rPr lang="en-GB" smtClean="0"/>
-              <a:t>07/11/2025</a:t>
+              <a:t>25/11/2025</a:t>
             </a:fld>
             <a:endParaRPr lang="en-GB"/>
           </a:p>
